--- a/presentation/Capstone_WiFi_Heatmap.pptx
+++ b/presentation/Capstone_WiFi_Heatmap.pptx
@@ -8025,7 +8025,7 @@
                 <a:ea typeface="AppleGothic" pitchFamily="34" charset="-122"/>
                 <a:cs typeface="AppleGothic" pitchFamily="34" charset="-120"/>
               </a:rPr>
-              <a:t>제대로 굴러가게 한 3가지 + 벽을 숫자로</a:t>
+              <a:t>안정적인 시뮬레이션을 위한 3가지 장치</a:t>
             </a:r>
             <a:endParaRPr lang="en-US" sz="2600" dirty="0"/>
           </a:p>
@@ -8091,7 +8091,7 @@
         </p:nvSpPr>
         <p:spPr>
           <a:xfrm>
-            <a:off x="804672" y="1901952"/>
+            <a:off x="822960" y="1938528"/>
             <a:ext cx="384048" cy="384048"/>
           </a:xfrm>
           <a:prstGeom prst="ellipse">
@@ -8111,7 +8111,7 @@
         </p:nvSpPr>
         <p:spPr>
           <a:xfrm>
-            <a:off x="804672" y="1901952"/>
+            <a:off x="822960" y="1938528"/>
             <a:ext cx="384048" cy="384048"/>
           </a:xfrm>
           <a:prstGeom prst="rect">
@@ -8150,8 +8150,8 @@
         </p:nvSpPr>
         <p:spPr>
           <a:xfrm>
-            <a:off x="1280160" y="1901952"/>
-            <a:ext cx="2679192" cy="411480"/>
+            <a:off x="1316736" y="1901952"/>
+            <a:ext cx="2633472" cy="365760"/>
           </a:xfrm>
           <a:prstGeom prst="rect">
             <a:avLst/>
@@ -8177,11 +8177,36 @@
               </a:rPr>
               <a:t>톱니바퀴처럼 엇갈린 배치</a:t>
             </a:r>
+            <a:endParaRPr lang="en-US" sz="1350" dirty="0"/>
+          </a:p>
+        </p:txBody>
+      </p:sp>
+      <p:sp>
+        <p:nvSpPr>
+          <p:cNvPr id="10" name="Text 8"/>
+          <p:cNvSpPr/>
+          <p:nvPr/>
+        </p:nvSpPr>
+        <p:spPr>
+          <a:xfrm>
+            <a:off x="1316736" y="2249424"/>
+            <a:ext cx="2633472" cy="274320"/>
+          </a:xfrm>
+          <a:prstGeom prst="rect">
+            <a:avLst/>
+          </a:prstGeom>
+          <a:noFill/>
+          <a:ln/>
+        </p:spPr>
+        <p:txBody>
+          <a:bodyPr wrap="square" lIns="0" tIns="0" rIns="0" bIns="0" rtlCol="0" anchor="ctr"/>
+          <a:lstStyle/>
+          <a:p>
             <a:pPr indent="0" marL="0">
               <a:buNone/>
             </a:pPr>
             <a:r>
-              <a:rPr lang="en-US" sz="1100" dirty="0">
+              <a:rPr lang="en-US" sz="1050" dirty="0">
                 <a:solidFill>
                   <a:srgbClr val="6B7C8F"/>
                 </a:solidFill>
@@ -8189,22 +8214,22 @@
                 <a:ea typeface="AppleGothic" pitchFamily="34" charset="-122"/>
                 <a:cs typeface="AppleGothic" pitchFamily="34" charset="-120"/>
               </a:rPr>
-              <a:t>  (Yee 격자)</a:t>
-            </a:r>
-            <a:endParaRPr lang="en-US" sz="1350" dirty="0"/>
-          </a:p>
-        </p:txBody>
-      </p:sp>
-      <p:sp>
-        <p:nvSpPr>
-          <p:cNvPr id="10" name="Text 8"/>
-          <p:cNvSpPr/>
-          <p:nvPr/>
-        </p:nvSpPr>
-        <p:spPr>
-          <a:xfrm>
-            <a:off x="822960" y="2514600"/>
-            <a:ext cx="3044952" cy="1417320"/>
+              <a:t>Yee 격자</a:t>
+            </a:r>
+            <a:endParaRPr lang="en-US" sz="1050" dirty="0"/>
+          </a:p>
+        </p:txBody>
+      </p:sp>
+      <p:sp>
+        <p:nvSpPr>
+          <p:cNvPr id="11" name="Text 9"/>
+          <p:cNvSpPr/>
+          <p:nvPr/>
+        </p:nvSpPr>
+        <p:spPr>
+          <a:xfrm>
+            <a:off x="822960" y="2743200"/>
+            <a:ext cx="3044952" cy="1371600"/>
           </a:xfrm>
           <a:prstGeom prst="rect">
             <a:avLst/>
@@ -8218,7 +8243,7 @@
           <a:p>
             <a:pPr indent="0" marL="0">
               <a:lnSpc>
-                <a:spcPct val="108000"/>
+                <a:spcPct val="110000"/>
               </a:lnSpc>
               <a:buNone/>
             </a:pPr>
@@ -8231,7 +8256,7 @@
                 <a:ea typeface="AppleGothic" pitchFamily="34" charset="-122"/>
                 <a:cs typeface="AppleGothic" pitchFamily="34" charset="-120"/>
               </a:rPr>
-              <a:t>전기장과 자기장을 같은 칸이 아니라 반 칸씩 어긋나게 둡니다. 톱니바퀴 맞물리듯 — 계산이 안정적이고 정확해집니다.</a:t>
+              <a:t>전기장과 자기장을 같은 칸이 아니라 반 칸씩 어긋나게 둡니다. 톱니바퀴가 맞물리듯, 계산이 안정적이고 정확해집니다.</a:t>
             </a:r>
             <a:endParaRPr lang="en-US" sz="1200" dirty="0"/>
           </a:p>
@@ -8239,7 +8264,7 @@
       </p:sp>
       <p:sp>
         <p:nvSpPr>
-          <p:cNvPr id="11" name="Shape 9"/>
+          <p:cNvPr id="12" name="Shape 10"/>
           <p:cNvSpPr/>
           <p:nvPr/>
         </p:nvSpPr>
@@ -8271,7 +8296,7 @@
       </p:sp>
       <p:sp>
         <p:nvSpPr>
-          <p:cNvPr id="12" name="Shape 10"/>
+          <p:cNvPr id="13" name="Shape 11"/>
           <p:cNvSpPr/>
           <p:nvPr/>
         </p:nvSpPr>
@@ -8291,13 +8316,13 @@
       </p:sp>
       <p:sp>
         <p:nvSpPr>
-          <p:cNvPr id="13" name="Shape 11"/>
-          <p:cNvSpPr/>
-          <p:nvPr/>
-        </p:nvSpPr>
-        <p:spPr>
-          <a:xfrm>
-            <a:off x="4553712" y="1901952"/>
+          <p:cNvPr id="14" name="Shape 12"/>
+          <p:cNvSpPr/>
+          <p:nvPr/>
+        </p:nvSpPr>
+        <p:spPr>
+          <a:xfrm>
+            <a:off x="4572000" y="1938528"/>
             <a:ext cx="384048" cy="384048"/>
           </a:xfrm>
           <a:prstGeom prst="ellipse">
@@ -8311,13 +8336,13 @@
       </p:sp>
       <p:sp>
         <p:nvSpPr>
-          <p:cNvPr id="14" name="Text 12"/>
-          <p:cNvSpPr/>
-          <p:nvPr/>
-        </p:nvSpPr>
-        <p:spPr>
-          <a:xfrm>
-            <a:off x="4553712" y="1901952"/>
+          <p:cNvPr id="15" name="Text 13"/>
+          <p:cNvSpPr/>
+          <p:nvPr/>
+        </p:nvSpPr>
+        <p:spPr>
+          <a:xfrm>
+            <a:off x="4572000" y="1938528"/>
             <a:ext cx="384048" cy="384048"/>
           </a:xfrm>
           <a:prstGeom prst="rect">
@@ -8350,14 +8375,14 @@
       </p:sp>
       <p:sp>
         <p:nvSpPr>
-          <p:cNvPr id="15" name="Text 13"/>
-          <p:cNvSpPr/>
-          <p:nvPr/>
-        </p:nvSpPr>
-        <p:spPr>
-          <a:xfrm>
-            <a:off x="5029200" y="1901952"/>
-            <a:ext cx="2679192" cy="411480"/>
+          <p:cNvPr id="16" name="Text 14"/>
+          <p:cNvSpPr/>
+          <p:nvPr/>
+        </p:nvSpPr>
+        <p:spPr>
+          <a:xfrm>
+            <a:off x="5065776" y="1901952"/>
+            <a:ext cx="2633472" cy="365760"/>
           </a:xfrm>
           <a:prstGeom prst="rect">
             <a:avLst/>
@@ -8383,11 +8408,36 @@
               </a:rPr>
               <a:t>안전한 시간 간격</a:t>
             </a:r>
+            <a:endParaRPr lang="en-US" sz="1350" dirty="0"/>
+          </a:p>
+        </p:txBody>
+      </p:sp>
+      <p:sp>
+        <p:nvSpPr>
+          <p:cNvPr id="17" name="Text 15"/>
+          <p:cNvSpPr/>
+          <p:nvPr/>
+        </p:nvSpPr>
+        <p:spPr>
+          <a:xfrm>
+            <a:off x="5065776" y="2249424"/>
+            <a:ext cx="2633472" cy="274320"/>
+          </a:xfrm>
+          <a:prstGeom prst="rect">
+            <a:avLst/>
+          </a:prstGeom>
+          <a:noFill/>
+          <a:ln/>
+        </p:spPr>
+        <p:txBody>
+          <a:bodyPr wrap="square" lIns="0" tIns="0" rIns="0" bIns="0" rtlCol="0" anchor="ctr"/>
+          <a:lstStyle/>
+          <a:p>
             <a:pPr indent="0" marL="0">
               <a:buNone/>
             </a:pPr>
             <a:r>
-              <a:rPr lang="en-US" sz="1100" dirty="0">
+              <a:rPr lang="en-US" sz="1050" dirty="0">
                 <a:solidFill>
                   <a:srgbClr val="6B7C8F"/>
                 </a:solidFill>
@@ -8395,22 +8445,22 @@
                 <a:ea typeface="AppleGothic" pitchFamily="34" charset="-122"/>
                 <a:cs typeface="AppleGothic" pitchFamily="34" charset="-120"/>
               </a:rPr>
-              <a:t>  (CFL 조건)</a:t>
-            </a:r>
-            <a:endParaRPr lang="en-US" sz="1350" dirty="0"/>
-          </a:p>
-        </p:txBody>
-      </p:sp>
-      <p:sp>
-        <p:nvSpPr>
-          <p:cNvPr id="16" name="Text 14"/>
-          <p:cNvSpPr/>
-          <p:nvPr/>
-        </p:nvSpPr>
-        <p:spPr>
-          <a:xfrm>
-            <a:off x="4572000" y="2514600"/>
-            <a:ext cx="3044952" cy="1417320"/>
+              <a:t>CFL 조건</a:t>
+            </a:r>
+            <a:endParaRPr lang="en-US" sz="1050" dirty="0"/>
+          </a:p>
+        </p:txBody>
+      </p:sp>
+      <p:sp>
+        <p:nvSpPr>
+          <p:cNvPr id="18" name="Text 16"/>
+          <p:cNvSpPr/>
+          <p:nvPr/>
+        </p:nvSpPr>
+        <p:spPr>
+          <a:xfrm>
+            <a:off x="4572000" y="2743200"/>
+            <a:ext cx="3044952" cy="1371600"/>
           </a:xfrm>
           <a:prstGeom prst="rect">
             <a:avLst/>
@@ -8424,7 +8474,7 @@
           <a:p>
             <a:pPr indent="0" marL="0">
               <a:lnSpc>
-                <a:spcPct val="108000"/>
+                <a:spcPct val="110000"/>
               </a:lnSpc>
               <a:buNone/>
             </a:pPr>
@@ -8445,14 +8495,14 @@
       </p:sp>
       <p:sp>
         <p:nvSpPr>
-          <p:cNvPr id="17" name="Shape 15"/>
-          <p:cNvSpPr/>
-          <p:nvPr/>
-        </p:nvSpPr>
-        <p:spPr>
-          <a:xfrm>
-            <a:off x="4572000" y="3977640"/>
-            <a:ext cx="3044952" cy="502920"/>
+          <p:cNvPr id="19" name="Shape 17"/>
+          <p:cNvSpPr/>
+          <p:nvPr/>
+        </p:nvSpPr>
+        <p:spPr>
+          <a:xfrm>
+            <a:off x="4572000" y="4041648"/>
+            <a:ext cx="3044952" cy="457200"/>
           </a:xfrm>
           <a:prstGeom prst="rect">
             <a:avLst/>
@@ -8465,14 +8515,14 @@
       </p:sp>
       <p:sp>
         <p:nvSpPr>
-          <p:cNvPr id="18" name="Text 16"/>
-          <p:cNvSpPr/>
-          <p:nvPr/>
-        </p:nvSpPr>
-        <p:spPr>
-          <a:xfrm>
-            <a:off x="4572000" y="3977640"/>
-            <a:ext cx="3044952" cy="502920"/>
+          <p:cNvPr id="20" name="Text 18"/>
+          <p:cNvSpPr/>
+          <p:nvPr/>
+        </p:nvSpPr>
+        <p:spPr>
+          <a:xfrm>
+            <a:off x="4572000" y="4041648"/>
+            <a:ext cx="3044952" cy="457200"/>
           </a:xfrm>
           <a:prstGeom prst="rect">
             <a:avLst/>
@@ -8504,7 +8554,7 @@
       </p:sp>
       <p:sp>
         <p:nvSpPr>
-          <p:cNvPr id="19" name="Shape 17"/>
+          <p:cNvPr id="21" name="Shape 19"/>
           <p:cNvSpPr/>
           <p:nvPr/>
         </p:nvSpPr>
@@ -8536,7 +8586,7 @@
       </p:sp>
       <p:sp>
         <p:nvSpPr>
-          <p:cNvPr id="20" name="Shape 18"/>
+          <p:cNvPr id="22" name="Shape 20"/>
           <p:cNvSpPr/>
           <p:nvPr/>
         </p:nvSpPr>
@@ -8556,13 +8606,13 @@
       </p:sp>
       <p:sp>
         <p:nvSpPr>
-          <p:cNvPr id="21" name="Shape 19"/>
-          <p:cNvSpPr/>
-          <p:nvPr/>
-        </p:nvSpPr>
-        <p:spPr>
-          <a:xfrm>
-            <a:off x="8302752" y="1901952"/>
+          <p:cNvPr id="23" name="Shape 21"/>
+          <p:cNvSpPr/>
+          <p:nvPr/>
+        </p:nvSpPr>
+        <p:spPr>
+          <a:xfrm>
+            <a:off x="8321040" y="1938528"/>
             <a:ext cx="384048" cy="384048"/>
           </a:xfrm>
           <a:prstGeom prst="ellipse">
@@ -8576,13 +8626,13 @@
       </p:sp>
       <p:sp>
         <p:nvSpPr>
-          <p:cNvPr id="22" name="Text 20"/>
-          <p:cNvSpPr/>
-          <p:nvPr/>
-        </p:nvSpPr>
-        <p:spPr>
-          <a:xfrm>
-            <a:off x="8302752" y="1901952"/>
+          <p:cNvPr id="24" name="Text 22"/>
+          <p:cNvSpPr/>
+          <p:nvPr/>
+        </p:nvSpPr>
+        <p:spPr>
+          <a:xfrm>
+            <a:off x="8321040" y="1938528"/>
             <a:ext cx="384048" cy="384048"/>
           </a:xfrm>
           <a:prstGeom prst="rect">
@@ -8615,14 +8665,14 @@
       </p:sp>
       <p:sp>
         <p:nvSpPr>
-          <p:cNvPr id="23" name="Text 21"/>
-          <p:cNvSpPr/>
-          <p:nvPr/>
-        </p:nvSpPr>
-        <p:spPr>
-          <a:xfrm>
-            <a:off x="8778240" y="1901952"/>
-            <a:ext cx="2679192" cy="411480"/>
+          <p:cNvPr id="25" name="Text 23"/>
+          <p:cNvSpPr/>
+          <p:nvPr/>
+        </p:nvSpPr>
+        <p:spPr>
+          <a:xfrm>
+            <a:off x="8814816" y="1901952"/>
+            <a:ext cx="2633472" cy="365760"/>
           </a:xfrm>
           <a:prstGeom prst="rect">
             <a:avLst/>
@@ -8648,11 +8698,36 @@
               </a:rPr>
               <a:t>경계의 메아리 차단</a:t>
             </a:r>
+            <a:endParaRPr lang="en-US" sz="1350" dirty="0"/>
+          </a:p>
+        </p:txBody>
+      </p:sp>
+      <p:sp>
+        <p:nvSpPr>
+          <p:cNvPr id="26" name="Text 24"/>
+          <p:cNvSpPr/>
+          <p:nvPr/>
+        </p:nvSpPr>
+        <p:spPr>
+          <a:xfrm>
+            <a:off x="8814816" y="2249424"/>
+            <a:ext cx="2633472" cy="274320"/>
+          </a:xfrm>
+          <a:prstGeom prst="rect">
+            <a:avLst/>
+          </a:prstGeom>
+          <a:noFill/>
+          <a:ln/>
+        </p:spPr>
+        <p:txBody>
+          <a:bodyPr wrap="square" lIns="0" tIns="0" rIns="0" bIns="0" rtlCol="0" anchor="ctr"/>
+          <a:lstStyle/>
+          <a:p>
             <a:pPr indent="0" marL="0">
               <a:buNone/>
             </a:pPr>
             <a:r>
-              <a:rPr lang="en-US" sz="1100" dirty="0">
+              <a:rPr lang="en-US" sz="1050" dirty="0">
                 <a:solidFill>
                   <a:srgbClr val="6B7C8F"/>
                 </a:solidFill>
@@ -8660,22 +8735,22 @@
                 <a:ea typeface="AppleGothic" pitchFamily="34" charset="-122"/>
                 <a:cs typeface="AppleGothic" pitchFamily="34" charset="-120"/>
               </a:rPr>
-              <a:t>  (PML 흡수층)</a:t>
-            </a:r>
-            <a:endParaRPr lang="en-US" sz="1350" dirty="0"/>
-          </a:p>
-        </p:txBody>
-      </p:sp>
-      <p:sp>
-        <p:nvSpPr>
-          <p:cNvPr id="24" name="Text 22"/>
-          <p:cNvSpPr/>
-          <p:nvPr/>
-        </p:nvSpPr>
-        <p:spPr>
-          <a:xfrm>
-            <a:off x="8321040" y="2514600"/>
-            <a:ext cx="3044952" cy="1417320"/>
+              <a:t>PML 흡수층</a:t>
+            </a:r>
+            <a:endParaRPr lang="en-US" sz="1050" dirty="0"/>
+          </a:p>
+        </p:txBody>
+      </p:sp>
+      <p:sp>
+        <p:nvSpPr>
+          <p:cNvPr id="27" name="Text 25"/>
+          <p:cNvSpPr/>
+          <p:nvPr/>
+        </p:nvSpPr>
+        <p:spPr>
+          <a:xfrm>
+            <a:off x="8321040" y="2743200"/>
+            <a:ext cx="3044952" cy="1371600"/>
           </a:xfrm>
           <a:prstGeom prst="rect">
             <a:avLst/>
@@ -8689,7 +8764,7 @@
           <a:p>
             <a:pPr indent="0" marL="0">
               <a:lnSpc>
-                <a:spcPct val="108000"/>
+                <a:spcPct val="110000"/>
               </a:lnSpc>
               <a:buNone/>
             </a:pPr>
@@ -8710,7 +8785,7 @@
       </p:sp>
       <p:sp>
         <p:nvSpPr>
-          <p:cNvPr id="25" name="Shape 23"/>
+          <p:cNvPr id="28" name="Shape 26"/>
           <p:cNvSpPr/>
           <p:nvPr/>
         </p:nvSpPr>
@@ -8742,7 +8817,7 @@
       </p:sp>
       <p:sp>
         <p:nvSpPr>
-          <p:cNvPr id="26" name="Shape 24"/>
+          <p:cNvPr id="29" name="Shape 27"/>
           <p:cNvSpPr/>
           <p:nvPr/>
         </p:nvSpPr>
@@ -8762,14 +8837,14 @@
       </p:sp>
       <p:sp>
         <p:nvSpPr>
-          <p:cNvPr id="27" name="Text 25"/>
-          <p:cNvSpPr/>
-          <p:nvPr/>
-        </p:nvSpPr>
-        <p:spPr>
-          <a:xfrm>
-            <a:off x="822960" y="5074920"/>
-            <a:ext cx="2926080" cy="365760"/>
+          <p:cNvPr id="30" name="Text 28"/>
+          <p:cNvSpPr/>
+          <p:nvPr/>
+        </p:nvSpPr>
+        <p:spPr>
+          <a:xfrm>
+            <a:off x="822960" y="5102352"/>
+            <a:ext cx="2651760" cy="365760"/>
           </a:xfrm>
           <a:prstGeom prst="rect">
             <a:avLst/>
@@ -8785,7 +8860,7 @@
               <a:buNone/>
             </a:pPr>
             <a:r>
-              <a:rPr lang="en-US" sz="1450" b="1" dirty="0">
+              <a:rPr lang="en-US" sz="1400" b="1" dirty="0">
                 <a:solidFill>
                   <a:srgbClr val="13283B"/>
                 </a:solidFill>
@@ -8793,22 +8868,22 @@
                 <a:ea typeface="AppleGothic" pitchFamily="34" charset="-122"/>
                 <a:cs typeface="AppleGothic" pitchFamily="34" charset="-120"/>
               </a:rPr>
-              <a:t>벽을 숫자로 새긴다</a:t>
-            </a:r>
-            <a:endParaRPr lang="en-US" sz="1450" dirty="0"/>
-          </a:p>
-        </p:txBody>
-      </p:sp>
-      <p:sp>
-        <p:nvSpPr>
-          <p:cNvPr id="28" name="Text 26"/>
-          <p:cNvSpPr/>
-          <p:nvPr/>
-        </p:nvSpPr>
-        <p:spPr>
-          <a:xfrm>
-            <a:off x="3657600" y="5074920"/>
-            <a:ext cx="7772400" cy="868680"/>
+              <a:t>+  벽을 숫자로 새긴다</a:t>
+            </a:r>
+            <a:endParaRPr lang="en-US" sz="1400" dirty="0"/>
+          </a:p>
+        </p:txBody>
+      </p:sp>
+      <p:sp>
+        <p:nvSpPr>
+          <p:cNvPr id="31" name="Text 29"/>
+          <p:cNvSpPr/>
+          <p:nvPr/>
+        </p:nvSpPr>
+        <p:spPr>
+          <a:xfrm>
+            <a:off x="3246120" y="5102352"/>
+            <a:ext cx="8138160" cy="777240"/>
           </a:xfrm>
           <a:prstGeom prst="rect">
             <a:avLst/>
@@ -8835,7 +8910,7 @@
                 <a:ea typeface="AppleGothic" pitchFamily="34" charset="-122"/>
                 <a:cs typeface="AppleGothic" pitchFamily="34" charset="-120"/>
               </a:rPr>
-              <a:t>각 칸에 재질의 전기적 성질(유전율 εr, 전도율 σ)을 기록 → </a:t>
+              <a:t>각 칸에 재질의 전기적 성질(유전율 εr, 전도율 σ)을 기록하면, </a:t>
             </a:r>
             <a:pPr indent="0" marL="0">
               <a:lnSpc>
@@ -8852,7 +8927,7 @@
                 <a:ea typeface="AppleGothic" pitchFamily="34" charset="-122"/>
                 <a:cs typeface="AppleGothic" pitchFamily="34" charset="-120"/>
               </a:rPr>
-              <a:t>콘크리트·유리·석고보드가 전파를 서로 다르게 막고 통과시키도록</a:t>
+              <a:t>콘크리트·유리·석고보드가 전파를 서로 다르게 막고 통과시키는 현상</a:t>
             </a:r>
             <a:pPr indent="0" marL="0">
               <a:lnSpc>
@@ -8869,7 +8944,7 @@
                 <a:ea typeface="AppleGothic" pitchFamily="34" charset="-122"/>
                 <a:cs typeface="AppleGothic" pitchFamily="34" charset="-120"/>
               </a:rPr>
-              <a:t> 자연히 반영됩니다.</a:t>
+              <a:t>이 저절로 재현됩니다.</a:t>
             </a:r>
             <a:endParaRPr lang="en-US" sz="1250" dirty="0"/>
           </a:p>
@@ -8877,7 +8952,7 @@
       </p:sp>
       <p:sp>
         <p:nvSpPr>
-          <p:cNvPr id="29" name="Text 27"/>
+          <p:cNvPr id="32" name="Text 30"/>
           <p:cNvSpPr/>
           <p:nvPr/>
         </p:nvSpPr>
@@ -8916,7 +8991,7 @@
       </p:sp>
       <p:sp>
         <p:nvSpPr>
-          <p:cNvPr id="30" name="Text 28"/>
+          <p:cNvPr id="33" name="Text 31"/>
           <p:cNvSpPr/>
           <p:nvPr/>
         </p:nvSpPr>

--- a/presentation/Capstone_WiFi_Heatmap.pptx
+++ b/presentation/Capstone_WiFi_Heatmap.pptx
@@ -8256,7 +8256,7 @@
                 <a:ea typeface="AppleGothic" pitchFamily="34" charset="-122"/>
                 <a:cs typeface="AppleGothic" pitchFamily="34" charset="-120"/>
               </a:rPr>
-              <a:t>전기장과 자기장을 같은 칸이 아니라 반 칸씩 어긋나게 둡니다. 톱니바퀴가 맞물리듯, 계산이 안정적이고 정확해집니다.</a:t>
+              <a:t>전기장과 자기장을 반 칸씩 어긋난 위치에 배치. 톱니바퀴가 맞물리듯 두 장이 교차하며 갱신되어, 계산이 안정적이고 정확함.</a:t>
             </a:r>
             <a:endParaRPr lang="en-US" sz="1200" dirty="0"/>
           </a:p>
@@ -8487,7 +8487,7 @@
                 <a:ea typeface="AppleGothic" pitchFamily="34" charset="-122"/>
                 <a:cs typeface="AppleGothic" pitchFamily="34" charset="-120"/>
               </a:rPr>
-              <a:t>한 스텝의 시간이 너무 길면 물결이 칸을 건너뛰어 계산이 폭주(발산)합니다. 그래서 한계의 0.90배로만 전진합니다.</a:t>
+              <a:t>시간 간격이 너무 크면 물결이 칸을 건너뛰어 계산이 발산. 안정 한계의 0.90배로 제한해 폭주를 방지.</a:t>
             </a:r>
             <a:endParaRPr lang="en-US" sz="1200" dirty="0"/>
           </a:p>
@@ -8777,7 +8777,7 @@
                 <a:ea typeface="AppleGothic" pitchFamily="34" charset="-122"/>
                 <a:cs typeface="AppleGothic" pitchFamily="34" charset="-120"/>
               </a:rPr>
-              <a:t>방 끝에서 물결이 튕겨 되돌아오면 가짜 간섭이 생깁니다. 가장자리에 ‘흡수 스펀지’ 층을 둬 끝없는 공간처럼 만듭니다.</a:t>
+              <a:t>경계에서 반사된 물결은 가짜 간섭의 원인. 가장자리에 ‘흡수 스펀지’ 층을 둬 무한히 열린 공간처럼 처리.</a:t>
             </a:r>
             <a:endParaRPr lang="en-US" sz="1200" dirty="0"/>
           </a:p>
@@ -8910,7 +8910,7 @@
                 <a:ea typeface="AppleGothic" pitchFamily="34" charset="-122"/>
                 <a:cs typeface="AppleGothic" pitchFamily="34" charset="-120"/>
               </a:rPr>
-              <a:t>각 칸에 재질의 전기적 성질(유전율 εr, 전도율 σ)을 기록하면, </a:t>
+              <a:t>각 칸에 재질의 전기적 성질(유전율 εr, 전도율 σ)을 기록 → </a:t>
             </a:r>
             <a:pPr indent="0" marL="0">
               <a:lnSpc>
@@ -8927,7 +8927,7 @@
                 <a:ea typeface="AppleGothic" pitchFamily="34" charset="-122"/>
                 <a:cs typeface="AppleGothic" pitchFamily="34" charset="-120"/>
               </a:rPr>
-              <a:t>콘크리트·유리·석고보드가 전파를 서로 다르게 막고 통과시키는 현상</a:t>
+              <a:t>콘크리트·유리·석고보드의 서로 다른 차폐·투과 특성</a:t>
             </a:r>
             <a:pPr indent="0" marL="0">
               <a:lnSpc>
@@ -8944,7 +8944,7 @@
                 <a:ea typeface="AppleGothic" pitchFamily="34" charset="-122"/>
                 <a:cs typeface="AppleGothic" pitchFamily="34" charset="-120"/>
               </a:rPr>
-              <a:t>이 저절로 재현됩니다.</a:t>
+              <a:t>이 별도 보정 없이 자연히 반영.</a:t>
             </a:r>
             <a:endParaRPr lang="en-US" sz="1250" dirty="0"/>
           </a:p>
